--- a/morning-registration-activities/opinion-line/downloads/Opinion_Line_Sixth_Form.pptx
+++ b/morning-registration-activities/opinion-line/downloads/Opinion_Line_Sixth_Form.pptx
@@ -7211,7 +7211,7 @@
                 </a:solidFill>
                 <a:latin typeface="Karla"/>
               </a:rPr>
-              <a:t>If everybody agrees, it is a fact rather than a statement.</a:t>
+              <a:t>If everybody would agree, it will not split the room.</a:t>
             </a:r>
           </a:p>
         </p:txBody>
@@ -7516,7 +7516,7 @@
                 </a:solidFill>
                 <a:latin typeface="Karla"/>
               </a:rPr>
-              <a:t>Needs: nothing new. Five more statements are on page 2 of the resource pack.</a:t>
+              <a:t>Needs: nothing new.</a:t>
             </a:r>
           </a:p>
         </p:txBody>

--- a/morning-registration-activities/opinion-line/downloads/Opinion_Line_Sixth_Form.pptx
+++ b/morning-registration-activities/opinion-line/downloads/Opinion_Line_Sixth_Form.pptx
@@ -3147,7 +3147,7 @@
                 <a:solidFill>
                   <a:srgbClr val="B85B3C"/>
                 </a:solidFill>
-                <a:latin typeface="Karla"/>
+                <a:latin typeface="Calibri"/>
               </a:rPr>
               <a:t>MORNING REGISTRATION ACTIVITIES</a:t>
             </a:r>
@@ -3179,11 +3179,11 @@
           <a:p>
             <a:pPr algn="ctr"/>
             <a:r>
-              <a:rPr sz="4000" b="1">
+              <a:rPr sz="4000" b="0">
                 <a:solidFill>
                   <a:srgbClr val="B5502F"/>
                 </a:solidFill>
-                <a:latin typeface="Libre Caslon Display"/>
+                <a:latin typeface="Georgia"/>
               </a:rPr>
               <a:t>The Opinion Line</a:t>
             </a:r>
@@ -3265,7 +3265,7 @@
                 <a:solidFill>
                   <a:srgbClr val="FFFDF7"/>
                 </a:solidFill>
-                <a:latin typeface="Karla"/>
+                <a:latin typeface="Calibri"/>
               </a:rPr>
               <a:t>SIXTH FORM</a:t>
             </a:r>
@@ -3301,7 +3301,7 @@
                 <a:solidFill>
                   <a:srgbClr val="8F3F24"/>
                 </a:solidFill>
-                <a:latin typeface="Karla"/>
+                <a:latin typeface="Calibri"/>
               </a:rPr>
               <a:t>Where you stand is your answer, and you can move if you change your mind.</a:t>
             </a:r>
@@ -3458,7 +3458,7 @@
                 <a:solidFill>
                   <a:srgbClr val="FFFDF7"/>
                 </a:solidFill>
-                <a:latin typeface="Karla"/>
+                <a:latin typeface="Calibri"/>
               </a:rPr>
               <a:t>1</a:t>
             </a:r>
@@ -3494,7 +3494,7 @@
                 <a:solidFill>
                   <a:srgbClr val="B5502F"/>
                 </a:solidFill>
-                <a:latin typeface="Karla"/>
+                <a:latin typeface="Calibri"/>
               </a:rPr>
               <a:t>Two signs go up</a:t>
             </a:r>
@@ -3534,7 +3534,7 @@
                 <a:solidFill>
                   <a:srgbClr val="8F3F24"/>
                 </a:solidFill>
-                <a:latin typeface="Karla"/>
+                <a:latin typeface="Calibri"/>
               </a:rPr>
               <a:t>Agree at one end of the room and disagree at the other.</a:t>
             </a:r>
@@ -3691,7 +3691,7 @@
                 <a:solidFill>
                   <a:srgbClr val="FFFDF7"/>
                 </a:solidFill>
-                <a:latin typeface="Karla"/>
+                <a:latin typeface="Calibri"/>
               </a:rPr>
               <a:t>2</a:t>
             </a:r>
@@ -3727,7 +3727,7 @@
                 <a:solidFill>
                   <a:srgbClr val="B5502F"/>
                 </a:solidFill>
-                <a:latin typeface="Karla"/>
+                <a:latin typeface="Calibri"/>
               </a:rPr>
               <a:t>A statement goes up</a:t>
             </a:r>
@@ -3767,7 +3767,7 @@
                 <a:solidFill>
                   <a:srgbClr val="8F3F24"/>
                 </a:solidFill>
-                <a:latin typeface="Karla"/>
+                <a:latin typeface="Calibri"/>
               </a:rPr>
               <a:t>One statement on the board, and there is no right answer to it.</a:t>
             </a:r>
@@ -3924,7 +3924,7 @@
                 <a:solidFill>
                   <a:srgbClr val="FFFDF7"/>
                 </a:solidFill>
-                <a:latin typeface="Karla"/>
+                <a:latin typeface="Calibri"/>
               </a:rPr>
               <a:t>3</a:t>
             </a:r>
@@ -3960,7 +3960,7 @@
                 <a:solidFill>
                   <a:srgbClr val="B5502F"/>
                 </a:solidFill>
-                <a:latin typeface="Karla"/>
+                <a:latin typeface="Calibri"/>
               </a:rPr>
               <a:t>Everyone picks a spot</a:t>
             </a:r>
@@ -4000,7 +4000,7 @@
                 <a:solidFill>
                   <a:srgbClr val="8F3F24"/>
                 </a:solidFill>
-                <a:latin typeface="Karla"/>
+                <a:latin typeface="Calibri"/>
               </a:rPr>
               <a:t>Stand anywhere between the two signs, then two or three people say why.</a:t>
             </a:r>
@@ -4082,7 +4082,7 @@
                 <a:solidFill>
                   <a:srgbClr val="FFFDF7"/>
                 </a:solidFill>
-                <a:latin typeface="Libre Caslon Display"/>
+                <a:latin typeface="Georgia"/>
               </a:rPr>
               <a:t>“Loyalty to a friend matters more than telling the truth about them.”</a:t>
             </a:r>
@@ -4118,7 +4118,7 @@
                 <a:solidFill>
                   <a:srgbClr val="ECCFC4"/>
                 </a:solidFill>
-                <a:latin typeface="Karla"/>
+                <a:latin typeface="Calibri"/>
               </a:rPr>
               <a:t>The first of five statements in these slides</a:t>
             </a:r>
@@ -4154,7 +4154,7 @@
                 <a:solidFill>
                   <a:srgbClr val="C0876C"/>
                 </a:solidFill>
-                <a:latin typeface="Karla"/>
+                <a:latin typeface="Calibri"/>
               </a:rPr>
               <a:t>Needs: the two signs from the resource pack, on walls at opposite ends of the room.</a:t>
             </a:r>
@@ -4214,7 +4214,7 @@
                 <a:solidFill>
                   <a:srgbClr val="C0876C"/>
                 </a:solidFill>
-                <a:latin typeface="Libre Caslon Display"/>
+                <a:latin typeface="Georgia"/>
               </a:rPr>
               <a:t>The Pastoral Guide</a:t>
             </a:r>
@@ -4292,7 +4292,7 @@
                 <a:solidFill>
                   <a:srgbClr val="B85B3C"/>
                 </a:solidFill>
-                <a:latin typeface="Karla"/>
+                <a:latin typeface="Calibri"/>
               </a:rPr>
               <a:t>THE OPINION LINE  ·  SIXTH FORM  ·  STATEMENT 1 OF 5</a:t>
             </a:r>
@@ -4381,11 +4381,11 @@
               </a:lnSpc>
             </a:pPr>
             <a:r>
-              <a:rPr sz="3400" b="1">
+              <a:rPr sz="3400" b="0">
                 <a:solidFill>
                   <a:srgbClr val="B5502F"/>
                 </a:solidFill>
-                <a:latin typeface="Libre Caslon Display"/>
+                <a:latin typeface="Georgia"/>
               </a:rPr>
               <a:t>Loyalty to a friend matters more than telling the truth about them.</a:t>
             </a:r>
@@ -4555,7 +4555,7 @@
                 <a:solidFill>
                   <a:srgbClr val="B85B3C"/>
                 </a:solidFill>
-                <a:latin typeface="Karla"/>
+                <a:latin typeface="Calibri"/>
               </a:rPr>
               <a:t>AGREE</a:t>
             </a:r>
@@ -4591,7 +4591,7 @@
                 <a:solidFill>
                   <a:srgbClr val="B85B3C"/>
                 </a:solidFill>
-                <a:latin typeface="Karla"/>
+                <a:latin typeface="Calibri"/>
               </a:rPr>
               <a:t>DISAGREE</a:t>
             </a:r>
@@ -4627,7 +4627,7 @@
                 <a:solidFill>
                   <a:srgbClr val="8F3F24"/>
                 </a:solidFill>
-                <a:latin typeface="Karla"/>
+                <a:latin typeface="Calibri"/>
               </a:rPr>
               <a:t>Stand anywhere between the two signs. The middle counts.</a:t>
             </a:r>
@@ -4687,7 +4687,7 @@
                 <a:solidFill>
                   <a:srgbClr val="C0876C"/>
                 </a:solidFill>
-                <a:latin typeface="Libre Caslon Display"/>
+                <a:latin typeface="Georgia"/>
               </a:rPr>
               <a:t>The Pastoral Guide</a:t>
             </a:r>
@@ -4765,7 +4765,7 @@
                 <a:solidFill>
                   <a:srgbClr val="B85B3C"/>
                 </a:solidFill>
-                <a:latin typeface="Karla"/>
+                <a:latin typeface="Calibri"/>
               </a:rPr>
               <a:t>THE OPINION LINE  ·  SIXTH FORM  ·  STATEMENT 2 OF 5</a:t>
             </a:r>
@@ -4854,11 +4854,11 @@
               </a:lnSpc>
             </a:pPr>
             <a:r>
-              <a:rPr sz="3400" b="1">
+              <a:rPr sz="3400" b="0">
                 <a:solidFill>
                   <a:srgbClr val="B5502F"/>
                 </a:solidFill>
-                <a:latin typeface="Libre Caslon Display"/>
+                <a:latin typeface="Georgia"/>
               </a:rPr>
               <a:t>You cannot be sure what you think until you have argued for the opposite.</a:t>
             </a:r>
@@ -5028,7 +5028,7 @@
                 <a:solidFill>
                   <a:srgbClr val="B85B3C"/>
                 </a:solidFill>
-                <a:latin typeface="Karla"/>
+                <a:latin typeface="Calibri"/>
               </a:rPr>
               <a:t>AGREE</a:t>
             </a:r>
@@ -5064,7 +5064,7 @@
                 <a:solidFill>
                   <a:srgbClr val="B85B3C"/>
                 </a:solidFill>
-                <a:latin typeface="Karla"/>
+                <a:latin typeface="Calibri"/>
               </a:rPr>
               <a:t>DISAGREE</a:t>
             </a:r>
@@ -5100,7 +5100,7 @@
                 <a:solidFill>
                   <a:srgbClr val="8F3F24"/>
                 </a:solidFill>
-                <a:latin typeface="Karla"/>
+                <a:latin typeface="Calibri"/>
               </a:rPr>
               <a:t>Stand anywhere between the two signs. The middle counts.</a:t>
             </a:r>
@@ -5160,7 +5160,7 @@
                 <a:solidFill>
                   <a:srgbClr val="C0876C"/>
                 </a:solidFill>
-                <a:latin typeface="Libre Caslon Display"/>
+                <a:latin typeface="Georgia"/>
               </a:rPr>
               <a:t>The Pastoral Guide</a:t>
             </a:r>
@@ -5238,7 +5238,7 @@
                 <a:solidFill>
                   <a:srgbClr val="B85B3C"/>
                 </a:solidFill>
-                <a:latin typeface="Karla"/>
+                <a:latin typeface="Calibri"/>
               </a:rPr>
               <a:t>THE OPINION LINE  ·  SIXTH FORM  ·  STATEMENT 3 OF 5</a:t>
             </a:r>
@@ -5327,11 +5327,11 @@
               </a:lnSpc>
             </a:pPr>
             <a:r>
-              <a:rPr sz="3400" b="1">
+              <a:rPr sz="3400" b="0">
                 <a:solidFill>
                   <a:srgbClr val="B5502F"/>
                 </a:solidFill>
-                <a:latin typeface="Libre Caslon Display"/>
+                <a:latin typeface="Georgia"/>
               </a:rPr>
               <a:t>The best year of your life should not be the one you are in.</a:t>
             </a:r>
@@ -5501,7 +5501,7 @@
                 <a:solidFill>
                   <a:srgbClr val="B85B3C"/>
                 </a:solidFill>
-                <a:latin typeface="Karla"/>
+                <a:latin typeface="Calibri"/>
               </a:rPr>
               <a:t>AGREE</a:t>
             </a:r>
@@ -5537,7 +5537,7 @@
                 <a:solidFill>
                   <a:srgbClr val="B85B3C"/>
                 </a:solidFill>
-                <a:latin typeface="Karla"/>
+                <a:latin typeface="Calibri"/>
               </a:rPr>
               <a:t>DISAGREE</a:t>
             </a:r>
@@ -5573,7 +5573,7 @@
                 <a:solidFill>
                   <a:srgbClr val="8F3F24"/>
                 </a:solidFill>
-                <a:latin typeface="Karla"/>
+                <a:latin typeface="Calibri"/>
               </a:rPr>
               <a:t>Stand anywhere between the two signs. The middle counts.</a:t>
             </a:r>
@@ -5633,7 +5633,7 @@
                 <a:solidFill>
                   <a:srgbClr val="C0876C"/>
                 </a:solidFill>
-                <a:latin typeface="Libre Caslon Display"/>
+                <a:latin typeface="Georgia"/>
               </a:rPr>
               <a:t>The Pastoral Guide</a:t>
             </a:r>
@@ -5711,7 +5711,7 @@
                 <a:solidFill>
                   <a:srgbClr val="B85B3C"/>
                 </a:solidFill>
-                <a:latin typeface="Karla"/>
+                <a:latin typeface="Calibri"/>
               </a:rPr>
               <a:t>THE OPINION LINE  ·  SIXTH FORM  ·  STATEMENT 4 OF 5</a:t>
             </a:r>
@@ -5800,11 +5800,11 @@
               </a:lnSpc>
             </a:pPr>
             <a:r>
-              <a:rPr sz="3400" b="1">
+              <a:rPr sz="3400" b="0">
                 <a:solidFill>
                   <a:srgbClr val="B5502F"/>
                 </a:solidFill>
-                <a:latin typeface="Libre Caslon Display"/>
+                <a:latin typeface="Georgia"/>
               </a:rPr>
               <a:t>It is possible to be too honest.</a:t>
             </a:r>
@@ -5974,7 +5974,7 @@
                 <a:solidFill>
                   <a:srgbClr val="B85B3C"/>
                 </a:solidFill>
-                <a:latin typeface="Karla"/>
+                <a:latin typeface="Calibri"/>
               </a:rPr>
               <a:t>AGREE</a:t>
             </a:r>
@@ -6010,7 +6010,7 @@
                 <a:solidFill>
                   <a:srgbClr val="B85B3C"/>
                 </a:solidFill>
-                <a:latin typeface="Karla"/>
+                <a:latin typeface="Calibri"/>
               </a:rPr>
               <a:t>DISAGREE</a:t>
             </a:r>
@@ -6046,7 +6046,7 @@
                 <a:solidFill>
                   <a:srgbClr val="8F3F24"/>
                 </a:solidFill>
-                <a:latin typeface="Karla"/>
+                <a:latin typeface="Calibri"/>
               </a:rPr>
               <a:t>Stand anywhere between the two signs. The middle counts.</a:t>
             </a:r>
@@ -6106,7 +6106,7 @@
                 <a:solidFill>
                   <a:srgbClr val="C0876C"/>
                 </a:solidFill>
-                <a:latin typeface="Libre Caslon Display"/>
+                <a:latin typeface="Georgia"/>
               </a:rPr>
               <a:t>The Pastoral Guide</a:t>
             </a:r>
@@ -6184,7 +6184,7 @@
                 <a:solidFill>
                   <a:srgbClr val="B85B3C"/>
                 </a:solidFill>
-                <a:latin typeface="Karla"/>
+                <a:latin typeface="Calibri"/>
               </a:rPr>
               <a:t>THE OPINION LINE  ·  SIXTH FORM  ·  STATEMENT 5 OF 5</a:t>
             </a:r>
@@ -6273,11 +6273,11 @@
               </a:lnSpc>
             </a:pPr>
             <a:r>
-              <a:rPr sz="3400" b="1">
+              <a:rPr sz="3400" b="0">
                 <a:solidFill>
                   <a:srgbClr val="B5502F"/>
                 </a:solidFill>
-                <a:latin typeface="Libre Caslon Display"/>
+                <a:latin typeface="Georgia"/>
               </a:rPr>
               <a:t>Most people choose their opinions to fit their friends.</a:t>
             </a:r>
@@ -6447,7 +6447,7 @@
                 <a:solidFill>
                   <a:srgbClr val="B85B3C"/>
                 </a:solidFill>
-                <a:latin typeface="Karla"/>
+                <a:latin typeface="Calibri"/>
               </a:rPr>
               <a:t>AGREE</a:t>
             </a:r>
@@ -6483,7 +6483,7 @@
                 <a:solidFill>
                   <a:srgbClr val="B85B3C"/>
                 </a:solidFill>
-                <a:latin typeface="Karla"/>
+                <a:latin typeface="Calibri"/>
               </a:rPr>
               <a:t>DISAGREE</a:t>
             </a:r>
@@ -6519,7 +6519,7 @@
                 <a:solidFill>
                   <a:srgbClr val="8F3F24"/>
                 </a:solidFill>
-                <a:latin typeface="Karla"/>
+                <a:latin typeface="Calibri"/>
               </a:rPr>
               <a:t>Stand anywhere between the two signs. The middle counts.</a:t>
             </a:r>
@@ -6579,7 +6579,7 @@
                 <a:solidFill>
                   <a:srgbClr val="C0876C"/>
                 </a:solidFill>
-                <a:latin typeface="Libre Caslon Display"/>
+                <a:latin typeface="Georgia"/>
               </a:rPr>
               <a:t>The Pastoral Guide</a:t>
             </a:r>
@@ -6657,7 +6657,7 @@
                 <a:solidFill>
                   <a:srgbClr val="B85B3C"/>
                 </a:solidFill>
-                <a:latin typeface="Karla"/>
+                <a:latin typeface="Calibri"/>
               </a:rPr>
               <a:t>THE OPINION LINE</a:t>
             </a:r>
@@ -6689,11 +6689,11 @@
           <a:p>
             <a:pPr algn="ctr"/>
             <a:r>
-              <a:rPr sz="4000" b="1">
+              <a:rPr sz="4000" b="0">
                 <a:solidFill>
                   <a:srgbClr val="B5502F"/>
                 </a:solidFill>
-                <a:latin typeface="Libre Caslon Display"/>
+                <a:latin typeface="Georgia"/>
               </a:rPr>
               <a:t>Your statement next</a:t>
             </a:r>
@@ -6733,7 +6733,7 @@
                 <a:solidFill>
                   <a:srgbClr val="8F3F24"/>
                 </a:solidFill>
-                <a:latin typeface="Karla"/>
+                <a:latin typeface="Calibri"/>
               </a:rPr>
               <a:t>Five statements in these slides, and five more on page 2 of the resource pack.</a:t>
             </a:r>
@@ -6743,7 +6743,7 @@
                 <a:solidFill>
                   <a:srgbClr val="8F3F24"/>
                 </a:solidFill>
-                <a:latin typeface="Karla"/>
+                <a:latin typeface="Calibri"/>
               </a:rPr>
               <a:t>After those, they come from you.</a:t>
             </a:r>
@@ -6900,7 +6900,7 @@
                 <a:solidFill>
                   <a:srgbClr val="FFFDF7"/>
                 </a:solidFill>
-                <a:latin typeface="Karla"/>
+                <a:latin typeface="Calibri"/>
               </a:rPr>
               <a:t>1</a:t>
             </a:r>
@@ -6936,7 +6936,7 @@
                 <a:solidFill>
                   <a:srgbClr val="B5502F"/>
                 </a:solidFill>
-                <a:latin typeface="Karla"/>
+                <a:latin typeface="Calibri"/>
               </a:rPr>
               <a:t>Think of a statement</a:t>
             </a:r>
@@ -6976,7 +6976,7 @@
                 <a:solidFill>
                   <a:srgbClr val="8F3F24"/>
                 </a:solidFill>
-                <a:latin typeface="Karla"/>
+                <a:latin typeface="Calibri"/>
               </a:rPr>
               <a:t>Something this form would really disagree about.</a:t>
             </a:r>
@@ -7133,7 +7133,7 @@
                 <a:solidFill>
                   <a:srgbClr val="FFFDF7"/>
                 </a:solidFill>
-                <a:latin typeface="Karla"/>
+                <a:latin typeface="Calibri"/>
               </a:rPr>
               <a:t>2</a:t>
             </a:r>
@@ -7169,7 +7169,7 @@
                 <a:solidFill>
                   <a:srgbClr val="B5502F"/>
                 </a:solidFill>
-                <a:latin typeface="Karla"/>
+                <a:latin typeface="Calibri"/>
               </a:rPr>
               <a:t>Check both ends work</a:t>
             </a:r>
@@ -7209,7 +7209,7 @@
                 <a:solidFill>
                   <a:srgbClr val="8F3F24"/>
                 </a:solidFill>
-                <a:latin typeface="Karla"/>
+                <a:latin typeface="Calibri"/>
               </a:rPr>
               <a:t>If everybody would agree, it will not split the room.</a:t>
             </a:r>
@@ -7366,7 +7366,7 @@
                 <a:solidFill>
                   <a:srgbClr val="FFFDF7"/>
                 </a:solidFill>
-                <a:latin typeface="Karla"/>
+                <a:latin typeface="Calibri"/>
               </a:rPr>
               <a:t>3</a:t>
             </a:r>
@@ -7402,7 +7402,7 @@
                 <a:solidFill>
                   <a:srgbClr val="B5502F"/>
                 </a:solidFill>
-                <a:latin typeface="Karla"/>
+                <a:latin typeface="Calibri"/>
               </a:rPr>
               <a:t>Bring it to your tutor</a:t>
             </a:r>
@@ -7442,7 +7442,7 @@
                 <a:solidFill>
                   <a:srgbClr val="8F3F24"/>
                 </a:solidFill>
-                <a:latin typeface="Karla"/>
+                <a:latin typeface="Calibri"/>
               </a:rPr>
               <a:t>One of them goes up on the board the next morning.</a:t>
             </a:r>
@@ -7478,7 +7478,7 @@
                 <a:solidFill>
                   <a:srgbClr val="B5502F"/>
                 </a:solidFill>
-                <a:latin typeface="Libre Caslon Display"/>
+                <a:latin typeface="Georgia"/>
               </a:rPr>
               <a:t>The best statements are the ones you are not sure about yourself.</a:t>
             </a:r>
@@ -7514,7 +7514,7 @@
                 <a:solidFill>
                   <a:srgbClr val="C0876C"/>
                 </a:solidFill>
-                <a:latin typeface="Karla"/>
+                <a:latin typeface="Calibri"/>
               </a:rPr>
               <a:t>Needs: nothing new.</a:t>
             </a:r>
@@ -7574,7 +7574,7 @@
                 <a:solidFill>
                   <a:srgbClr val="C0876C"/>
                 </a:solidFill>
-                <a:latin typeface="Libre Caslon Display"/>
+                <a:latin typeface="Georgia"/>
               </a:rPr>
               <a:t>The Pastoral Guide</a:t>
             </a:r>
